--- a/carpentry/intake-142/PowerPoint/Day-05_2026-11-04_Week-2.pptx
+++ b/carpentry/intake-142/PowerPoint/Day-05_2026-11-04_Week-2.pptx
@@ -1096,7 +1096,7 @@
           <a:p/>
           <a:p>
             <a:r>
-              <a:t>Figure 4.2 on page 57 shows the visual pattern within one inch. Whole-inch lines are longest, the half-inch line is prominent, and shorter lines distinguish quarters, eighths and sixteenths. What does that pattern help you do? Find a familiar landmark before counting smaller spaces. Half an inch is eight sixteenths, a quarter is four sixteenths and an eighth is two sixteenths. Use both the line pattern and the counted spaces as checks, but identify the scale first because another edge of a rule may use different graduations.</a:t>
+              <a:t>Figure 4.2 on page 89 shows the visual pattern within one inch. Whole-inch lines are longest, the half-inch line is prominent, and shorter lines distinguish quarters, eighths and sixteenths. What does that pattern help you do? Find a familiar landmark before counting smaller spaces. Half an inch is eight sixteenths, a quarter is four sixteenths and an eighth is two sixteenths. Use both the line pattern and the counted spaces as checks, but identify the scale first because another edge of a rule may use different graduations.</a:t>
             </a:r>
           </a:p>
         </p:txBody>
@@ -2682,7 +2682,7 @@
           <a:p/>
           <a:p>
             <a:r>
-              <a:t>Figure 4.3 on page 57 places marks A and B on a rule with whole inches and sixteenths. Before counting, identify the whole-inch line immediately to the left of each point. For A, that reference is two inches; for B, it is one inch. What error would result from counting only the fractional spaces and reporting them alone? We would lose the distance already represented by the whole inches. Trace from each whole-inch reference to its mark, and keep the fractional count attached to the whole-number part for the next example.</a:t>
+              <a:t>Figure 4.3 on page 89 places marks A and B on a rule with whole inches and sixteenths. Before counting, identify the whole-inch line immediately to the left of each point. For A, that reference is two inches; for B, it is one inch. What error would result from counting only the fractional spaces and reporting them alone? We would lose the distance already represented by the whole inches. Trace from each whole-inch reference to its mark, and keep the fractional count attached to the whole-number part for the next example.</a:t>
             </a:r>
           </a:p>
         </p:txBody>
@@ -5469,7 +5469,7 @@
                 </a:solidFill>
                 <a:latin typeface="Arial"/>
               </a:rPr>
-              <a:t>Textbook  |  page 56</a:t>
+              <a:t>Textbook  |  page 88</a:t>
             </a:r>
           </a:p>
         </p:txBody>
@@ -5517,7 +5517,7 @@
                 </a:solidFill>
                 <a:latin typeface="Arial"/>
               </a:rPr>
-              <a:t>Textbook sections 4.1–4.4 pp.56–61; sections 4.5 pp.62–63</a:t>
+              <a:t>Textbook sections 4.1–4.4 pp.88–94; sections 4.5 pp.95–96</a:t>
             </a:r>
           </a:p>
         </p:txBody>
@@ -5589,7 +5589,7 @@
                 </a:solidFill>
                 <a:latin typeface="Arial"/>
               </a:rPr>
-              <a:t>Textbook p.56 · Figure 4.1: larger denominators mean smaller equal parts.</a:t>
+              <a:t>Textbook p.88 · Figure 4.1: larger denominators mean smaller equal parts.</a:t>
             </a:r>
           </a:p>
         </p:txBody>
@@ -6203,7 +6203,7 @@
                 </a:solidFill>
                 <a:latin typeface="Arial"/>
               </a:rPr>
-              <a:t>Textbook sections 4.1–4.4 pp.56–61; sections 4.5 pp.62–63</a:t>
+              <a:t>Textbook sections 4.1–4.4 pp.88–94; sections 4.5 pp.95–96</a:t>
             </a:r>
           </a:p>
         </p:txBody>
@@ -6961,7 +6961,7 @@
                 </a:solidFill>
                 <a:latin typeface="Arial"/>
               </a:rPr>
-              <a:t>Textbook sections 4.1–4.4 pp.56–61; sections 4.5 pp.62–63</a:t>
+              <a:t>Textbook sections 4.1–4.4 pp.88–94; sections 4.5 pp.95–96</a:t>
             </a:r>
           </a:p>
         </p:txBody>
@@ -7161,7 +7161,7 @@
                 </a:solidFill>
                 <a:latin typeface="Arial"/>
               </a:rPr>
-              <a:t>Resources: Exercise Book 4A Q1–4 (p.25), Q6–11 (p.26)</a:t>
+              <a:t>Resources: Exercise Book 4A Q1–4 (p.35), Q6–11 (p.36)</a:t>
             </a:r>
           </a:p>
         </p:txBody>
@@ -7775,7 +7775,7 @@
                 </a:solidFill>
                 <a:latin typeface="Arial"/>
               </a:rPr>
-              <a:t>Textbook sections 4.1–4.4 pp.56–61; sections 4.5 pp.62–63</a:t>
+              <a:t>Textbook sections 4.1–4.4 pp.88–94; sections 4.5 pp.95–96</a:t>
             </a:r>
           </a:p>
         </p:txBody>
@@ -8506,7 +8506,7 @@
                 </a:solidFill>
                 <a:latin typeface="Arial"/>
               </a:rPr>
-              <a:t>Textbook sections 4.1–4.4 pp.56–61; sections 4.5 pp.62–63</a:t>
+              <a:t>Textbook sections 4.1–4.4 pp.88–94; sections 4.5 pp.95–96</a:t>
             </a:r>
           </a:p>
         </p:txBody>
@@ -9240,7 +9240,7 @@
                 </a:solidFill>
                 <a:latin typeface="Arial"/>
               </a:rPr>
-              <a:t>Textbook sections 4.1–4.4 pp.56–61; sections 4.5 pp.62–63</a:t>
+              <a:t>Textbook sections 4.1–4.4 pp.88–94; sections 4.5 pp.95–96</a:t>
             </a:r>
           </a:p>
         </p:txBody>
@@ -9440,7 +9440,7 @@
                 </a:solidFill>
                 <a:latin typeface="Arial"/>
               </a:rPr>
-              <a:t>Resources: Exercise Book 4A Q1–4 (p.25), Q6–11 (p.26)</a:t>
+              <a:t>Resources: Exercise Book 4A Q1–4 (p.35), Q6–11 (p.36)</a:t>
             </a:r>
           </a:p>
         </p:txBody>
@@ -10054,7 +10054,7 @@
                 </a:solidFill>
                 <a:latin typeface="Arial"/>
               </a:rPr>
-              <a:t>Textbook sections 4.1–4.4 pp.56–61; sections 4.5 pp.62–63</a:t>
+              <a:t>Textbook sections 4.1–4.4 pp.88–94; sections 4.5 pp.95–96</a:t>
             </a:r>
           </a:p>
         </p:txBody>
@@ -10830,7 +10830,7 @@
                 </a:solidFill>
                 <a:latin typeface="Arial"/>
               </a:rPr>
-              <a:t>Textbook sections 4.1–4.4 pp.56–61; sections 4.5 pp.62–63</a:t>
+              <a:t>Textbook sections 4.1–4.4 pp.88–94; sections 4.5 pp.95–96</a:t>
             </a:r>
           </a:p>
         </p:txBody>
@@ -11789,7 +11789,7 @@
                 </a:solidFill>
                 <a:latin typeface="Arial"/>
               </a:rPr>
-              <a:t>Textbook sections 4.1–4.4 pp.56–61; sections 4.5 pp.62–63</a:t>
+              <a:t>Textbook sections 4.1–4.4 pp.88–94; sections 4.5 pp.95–96</a:t>
             </a:r>
           </a:p>
         </p:txBody>
@@ -12476,7 +12476,7 @@
                 </a:solidFill>
                 <a:latin typeface="Arial"/>
               </a:rPr>
-              <a:t>Textbook sections 4.1–4.4 pp.56–61; sections 4.5 pp.62–63</a:t>
+              <a:t>Textbook sections 4.1–4.4 pp.88–94; sections 4.5 pp.95–96</a:t>
             </a:r>
           </a:p>
         </p:txBody>
@@ -16514,7 +16514,7 @@
                 </a:solidFill>
                 <a:latin typeface="Arial"/>
               </a:rPr>
-              <a:t>Textbook sections 4.1–4.4 pp.56–61; sections 4.5 pp.62–63</a:t>
+              <a:t>Textbook sections 4.1–4.4 pp.88–94; sections 4.5 pp.95–96</a:t>
             </a:r>
           </a:p>
         </p:txBody>
@@ -16714,7 +16714,7 @@
                 </a:solidFill>
                 <a:latin typeface="Arial"/>
               </a:rPr>
-              <a:t>Resources: Exercise Book 4A Q1–4 (p.25), Q6–11 (p.26)</a:t>
+              <a:t>Resources: Exercise Book 4A Q1–4 (p.35), Q6–11 (p.36)</a:t>
             </a:r>
           </a:p>
         </p:txBody>
@@ -17328,7 +17328,7 @@
                 </a:solidFill>
                 <a:latin typeface="Arial"/>
               </a:rPr>
-              <a:t>Textbook sections 4.1–4.4 pp.56–61; sections 4.5 pp.62–63</a:t>
+              <a:t>Textbook sections 4.1–4.4 pp.88–94; sections 4.5 pp.95–96</a:t>
             </a:r>
           </a:p>
         </p:txBody>
@@ -18014,7 +18014,7 @@
                 </a:solidFill>
                 <a:latin typeface="Arial"/>
               </a:rPr>
-              <a:t>Textbook sections 4.1–4.4 pp.56–61; sections 4.5 pp.62–63</a:t>
+              <a:t>Textbook sections 4.1–4.4 pp.88–94; sections 4.5 pp.95–96</a:t>
             </a:r>
           </a:p>
         </p:txBody>
@@ -18700,7 +18700,7 @@
                 </a:solidFill>
                 <a:latin typeface="Arial"/>
               </a:rPr>
-              <a:t>Textbook sections 4.1–4.4 pp.56–61; sections 4.5 pp.62–63</a:t>
+              <a:t>Textbook sections 4.1–4.4 pp.88–94; sections 4.5 pp.95–96</a:t>
             </a:r>
           </a:p>
         </p:txBody>
@@ -18900,7 +18900,7 @@
                 </a:solidFill>
                 <a:latin typeface="Arial"/>
               </a:rPr>
-              <a:t>Resources: Exercise Book 4A Q1–4 (p.25), Q6–11 (p.26)</a:t>
+              <a:t>Resources: Exercise Book 4A Q1–4 (p.35), Q6–11 (p.36)</a:t>
             </a:r>
           </a:p>
         </p:txBody>
@@ -20179,7 +20179,7 @@
                 </a:solidFill>
                 <a:latin typeface="Arial"/>
               </a:rPr>
-              <a:t>Textbook Chapter 4 pp.56–59</a:t>
+              <a:t>Textbook Chapter 4 pp.88–92</a:t>
             </a:r>
           </a:p>
         </p:txBody>
@@ -20379,7 +20379,7 @@
                 </a:solidFill>
                 <a:latin typeface="Arial"/>
               </a:rPr>
-              <a:t>Textbook Chapter 4 pp.56–59</a:t>
+              <a:t>Textbook Chapter 4 pp.88–92</a:t>
             </a:r>
           </a:p>
         </p:txBody>
@@ -20427,7 +20427,7 @@
                 </a:solidFill>
                 <a:latin typeface="Arial"/>
               </a:rPr>
-              <a:t>Exercise Book 4A Q1–4 (p.25); Q6–9 (p.26)</a:t>
+              <a:t>Exercise Book 4A Q1–4 (p.35); Q6–9 (p.36)</a:t>
             </a:r>
           </a:p>
         </p:txBody>
@@ -21089,7 +21089,7 @@
                 </a:solidFill>
                 <a:latin typeface="Arial"/>
               </a:rPr>
-              <a:t>Textbook Chapter 4 pp.56–59</a:t>
+              <a:t>Textbook Chapter 4 pp.88–92</a:t>
             </a:r>
           </a:p>
         </p:txBody>
@@ -21289,7 +21289,7 @@
                 </a:solidFill>
                 <a:latin typeface="Arial"/>
               </a:rPr>
-              <a:t>Resources: Exercise Book 4A Q1–4 (p.25); Q6–9 (p.26)</a:t>
+              <a:t>Resources: Exercise Book 4A Q1–4 (p.35); Q6–9 (p.36)</a:t>
             </a:r>
           </a:p>
         </p:txBody>
@@ -22038,7 +22038,7 @@
                 </a:solidFill>
                 <a:latin typeface="Arial"/>
               </a:rPr>
-              <a:t>Textbook Chapter 4 pp.56–59</a:t>
+              <a:t>Textbook Chapter 4 pp.88–92</a:t>
             </a:r>
           </a:p>
         </p:txBody>
@@ -23259,7 +23259,7 @@
                 </a:solidFill>
                 <a:latin typeface="Arial"/>
               </a:rPr>
-              <a:t>Textbook Chapter 4 pp.56–59</a:t>
+              <a:t>Textbook Chapter 4 pp.88–92</a:t>
             </a:r>
           </a:p>
         </p:txBody>
@@ -25190,7 +25190,7 @@
                 </a:solidFill>
                 <a:latin typeface="Arial"/>
               </a:rPr>
-              <a:t>Textbook sections 4.1–4.4 pp.56–61; sections 4.5 pp.62–63</a:t>
+              <a:t>Textbook sections 4.1–4.4 pp.88–94; sections 4.5 pp.95–96</a:t>
             </a:r>
           </a:p>
         </p:txBody>
@@ -25390,7 +25390,7 @@
                 </a:solidFill>
                 <a:latin typeface="Arial"/>
               </a:rPr>
-              <a:t>Textbook sections 4.1–4.4 pp.56–61; sections 4.5 pp.62–63</a:t>
+              <a:t>Textbook sections 4.1–4.4 pp.88–94; sections 4.5 pp.95–96</a:t>
             </a:r>
           </a:p>
         </p:txBody>
@@ -25438,7 +25438,7 @@
                 </a:solidFill>
                 <a:latin typeface="Arial"/>
               </a:rPr>
-              <a:t>Exercise Book 4A Q1–4 (p.25), Q6–11 (p.26)</a:t>
+              <a:t>Exercise Book 4A Q1–4 (p.35), Q6–11 (p.36)</a:t>
             </a:r>
           </a:p>
         </p:txBody>
@@ -26052,7 +26052,7 @@
                 </a:solidFill>
                 <a:latin typeface="Arial"/>
               </a:rPr>
-              <a:t>Textbook  |  page 57</a:t>
+              <a:t>Textbook  |  page 89</a:t>
             </a:r>
           </a:p>
         </p:txBody>
@@ -26100,7 +26100,7 @@
                 </a:solidFill>
                 <a:latin typeface="Arial"/>
               </a:rPr>
-              <a:t>Textbook Chapter 4 pp.56–59</a:t>
+              <a:t>Textbook Chapter 4 pp.88–92</a:t>
             </a:r>
           </a:p>
         </p:txBody>
@@ -26172,7 +26172,7 @@
                 </a:solidFill>
                 <a:latin typeface="Arial"/>
               </a:rPr>
-              <a:t>Textbook p.57 · Figure 4.3: read whole inches, then fractional spaces.</a:t>
+              <a:t>Textbook p.89 · Figure 4.3: read whole inches, then fractional spaces.</a:t>
             </a:r>
           </a:p>
         </p:txBody>
@@ -26738,7 +26738,7 @@
                 </a:solidFill>
                 <a:latin typeface="Arial"/>
               </a:rPr>
-              <a:t>Textbook  |  page 58</a:t>
+              <a:t>Textbook  |  page 90</a:t>
             </a:r>
           </a:p>
         </p:txBody>
@@ -26786,7 +26786,7 @@
                 </a:solidFill>
                 <a:latin typeface="Arial"/>
               </a:rPr>
-              <a:t>Textbook Chapter 4 pp.56–59</a:t>
+              <a:t>Textbook Chapter 4 pp.88–92</a:t>
             </a:r>
           </a:p>
         </p:txBody>
@@ -26858,7 +26858,7 @@
                 </a:solidFill>
                 <a:latin typeface="Arial"/>
               </a:rPr>
-              <a:t>Textbook p.58 · Example 4.2: name and simplify the complete reading.</a:t>
+              <a:t>Textbook p.90 · Example 4.2: name and simplify the complete reading.</a:t>
             </a:r>
           </a:p>
         </p:txBody>
@@ -27472,7 +27472,7 @@
                 </a:solidFill>
                 <a:latin typeface="Arial"/>
               </a:rPr>
-              <a:t>Textbook Chapter 4 pp.56–59</a:t>
+              <a:t>Textbook Chapter 4 pp.88–92</a:t>
             </a:r>
           </a:p>
         </p:txBody>
@@ -28230,7 +28230,7 @@
                 </a:solidFill>
                 <a:latin typeface="Arial"/>
               </a:rPr>
-              <a:t>Textbook Chapter 4 pp.56–59</a:t>
+              <a:t>Textbook Chapter 4 pp.88–92</a:t>
             </a:r>
           </a:p>
         </p:txBody>
@@ -28430,7 +28430,7 @@
                 </a:solidFill>
                 <a:latin typeface="Arial"/>
               </a:rPr>
-              <a:t>Resources: Exercise Book 4A Q1–4 (p.25); Q6–9 (p.26)</a:t>
+              <a:t>Resources: Exercise Book 4A Q1–4 (p.35); Q6–9 (p.36)</a:t>
             </a:r>
           </a:p>
         </p:txBody>
@@ -29044,7 +29044,7 @@
                 </a:solidFill>
                 <a:latin typeface="Arial"/>
               </a:rPr>
-              <a:t>Textbook Chapter 4 pp.56–59</a:t>
+              <a:t>Textbook Chapter 4 pp.88–92</a:t>
             </a:r>
           </a:p>
         </p:txBody>
@@ -29775,7 +29775,7 @@
                 </a:solidFill>
                 <a:latin typeface="Arial"/>
               </a:rPr>
-              <a:t>Textbook Chapter 4 pp.56–59</a:t>
+              <a:t>Textbook Chapter 4 pp.88–92</a:t>
             </a:r>
           </a:p>
         </p:txBody>
@@ -30509,7 +30509,7 @@
                 </a:solidFill>
                 <a:latin typeface="Arial"/>
               </a:rPr>
-              <a:t>Textbook Chapter 4 pp.56–59</a:t>
+              <a:t>Textbook Chapter 4 pp.88–92</a:t>
             </a:r>
           </a:p>
         </p:txBody>
@@ -30709,7 +30709,7 @@
                 </a:solidFill>
                 <a:latin typeface="Arial"/>
               </a:rPr>
-              <a:t>Resources: Exercise Book 4A Q1–4 (p.25); Q6–9 (p.26)</a:t>
+              <a:t>Resources: Exercise Book 4A Q1–4 (p.35); Q6–9 (p.36)</a:t>
             </a:r>
           </a:p>
         </p:txBody>
@@ -31323,7 +31323,7 @@
                 </a:solidFill>
                 <a:latin typeface="Arial"/>
               </a:rPr>
-              <a:t>Textbook Chapter 4 pp.56–59</a:t>
+              <a:t>Textbook Chapter 4 pp.88–92</a:t>
             </a:r>
           </a:p>
         </p:txBody>
@@ -32099,7 +32099,7 @@
                 </a:solidFill>
                 <a:latin typeface="Arial"/>
               </a:rPr>
-              <a:t>Textbook Chapter 4 pp.56–59</a:t>
+              <a:t>Textbook Chapter 4 pp.88–92</a:t>
             </a:r>
           </a:p>
         </p:txBody>
@@ -33058,7 +33058,7 @@
                 </a:solidFill>
                 <a:latin typeface="Arial"/>
               </a:rPr>
-              <a:t>Textbook Chapter 4 pp.56–59</a:t>
+              <a:t>Textbook Chapter 4 pp.88–92</a:t>
             </a:r>
           </a:p>
         </p:txBody>
@@ -33744,7 +33744,7 @@
                 </a:solidFill>
                 <a:latin typeface="Arial"/>
               </a:rPr>
-              <a:t>Textbook sections 4.1–4.4 pp.56–61; sections 4.5 pp.62–63</a:t>
+              <a:t>Textbook sections 4.1–4.4 pp.88–94; sections 4.5 pp.95–96</a:t>
             </a:r>
           </a:p>
         </p:txBody>
@@ -33944,7 +33944,7 @@
                 </a:solidFill>
                 <a:latin typeface="Arial"/>
               </a:rPr>
-              <a:t>Resources: Exercise Book 4A Q1–4 (p.25), Q6–11 (p.26)</a:t>
+              <a:t>Resources: Exercise Book 4A Q1–4 (p.35), Q6–11 (p.36)</a:t>
             </a:r>
           </a:p>
         </p:txBody>
@@ -34558,7 +34558,7 @@
                 </a:solidFill>
                 <a:latin typeface="Arial"/>
               </a:rPr>
-              <a:t>Textbook Chapter 4 pp.56–59</a:t>
+              <a:t>Textbook Chapter 4 pp.88–92</a:t>
             </a:r>
           </a:p>
         </p:txBody>
@@ -35245,7 +35245,7 @@
                 </a:solidFill>
                 <a:latin typeface="Arial"/>
               </a:rPr>
-              <a:t>Textbook Chapter 4 pp.56–59</a:t>
+              <a:t>Textbook Chapter 4 pp.88–92</a:t>
             </a:r>
           </a:p>
         </p:txBody>
@@ -35445,7 +35445,7 @@
                 </a:solidFill>
                 <a:latin typeface="Arial"/>
               </a:rPr>
-              <a:t>Resources: Exercise Book 4A Q1–4 (p.25); Q6–9 (p.26)</a:t>
+              <a:t>Resources: Exercise Book 4A Q1–4 (p.35); Q6–9 (p.36)</a:t>
             </a:r>
           </a:p>
         </p:txBody>
@@ -36059,7 +36059,7 @@
                 </a:solidFill>
                 <a:latin typeface="Arial"/>
               </a:rPr>
-              <a:t>Textbook Chapter 4 pp.56–59</a:t>
+              <a:t>Textbook Chapter 4 pp.88–92</a:t>
             </a:r>
           </a:p>
         </p:txBody>
@@ -36745,7 +36745,7 @@
                 </a:solidFill>
                 <a:latin typeface="Arial"/>
               </a:rPr>
-              <a:t>Textbook Chapter 4 pp.56–59</a:t>
+              <a:t>Textbook Chapter 4 pp.88–92</a:t>
             </a:r>
           </a:p>
         </p:txBody>
@@ -36945,7 +36945,7 @@
                 </a:solidFill>
                 <a:latin typeface="Arial"/>
               </a:rPr>
-              <a:t>Resources: Exercise Book 4A Q1–4 (p.25); Q6–9 (p.26)</a:t>
+              <a:t>Resources: Exercise Book 4A Q1–4 (p.35); Q6–9 (p.36)</a:t>
             </a:r>
           </a:p>
         </p:txBody>
@@ -37559,7 +37559,7 @@
                 </a:solidFill>
                 <a:latin typeface="Arial"/>
               </a:rPr>
-              <a:t>Textbook sections 4.1–4.4 pp.56–61; sections 4.5 pp.62–63</a:t>
+              <a:t>Textbook sections 4.1–4.4 pp.88–94; sections 4.5 pp.95–96</a:t>
             </a:r>
           </a:p>
         </p:txBody>
@@ -38380,7 +38380,7 @@
                 </a:solidFill>
                 <a:latin typeface="Arial"/>
               </a:rPr>
-              <a:t>Textbook sections 4.1–4.4 pp.56–61; sections 4.5 pp.62–63</a:t>
+              <a:t>Textbook sections 4.1–4.4 pp.88–94; sections 4.5 pp.95–96</a:t>
             </a:r>
           </a:p>
         </p:txBody>
@@ -39625,7 +39625,7 @@
                 </a:solidFill>
                 <a:latin typeface="Arial"/>
               </a:rPr>
-              <a:t>Textbook sections 4.1–4.4 pp.56–61; sections 4.5 pp.62–63</a:t>
+              <a:t>Textbook sections 4.1–4.4 pp.88–94; sections 4.5 pp.95–96</a:t>
             </a:r>
           </a:p>
         </p:txBody>
@@ -42395,7 +42395,7 @@
                 </a:solidFill>
                 <a:latin typeface="Arial"/>
               </a:rPr>
-              <a:t>Textbook  |  page 57</a:t>
+              <a:t>Textbook  |  page 89</a:t>
             </a:r>
           </a:p>
         </p:txBody>
@@ -42443,7 +42443,7 @@
                 </a:solidFill>
                 <a:latin typeface="Arial"/>
               </a:rPr>
-              <a:t>Textbook sections 4.1–4.4 pp.56–61; sections 4.5 pp.62–63</a:t>
+              <a:t>Textbook sections 4.1–4.4 pp.88–94; sections 4.5 pp.95–96</a:t>
             </a:r>
           </a:p>
         </p:txBody>
@@ -42515,7 +42515,7 @@
                 </a:solidFill>
                 <a:latin typeface="Arial"/>
               </a:rPr>
-              <a:t>Textbook p.57 · Figure 4.2: one inch divided into sixteenths.</a:t>
+              <a:t>Textbook p.89 · Figure 4.2: one inch divided into sixteenths.</a:t>
             </a:r>
           </a:p>
         </p:txBody>

--- a/carpentry/intake-142/PowerPoint/Day-05_2026-11-04_Week-2.pptx
+++ b/carpentry/intake-142/PowerPoint/Day-05_2026-11-04_Week-2.pptx
@@ -19173,6 +19173,104 @@
           </a:p>
         </p:txBody>
       </p:sp>
+      <p:sp>
+        <p:nvSpPr>
+          <p:cNvPr id="22" name="Play quiz W02-L05"/>
+          <p:cNvSpPr txBox="1"/>
+          <p:nvPr/>
+        </p:nvSpPr>
+        <p:spPr>
+          <a:xfrm>
+            <a:off x="6355080" y="6606540"/>
+            <a:ext cx="822960" cy="210312"/>
+          </a:xfrm>
+          <a:prstGeom prst="rect">
+            <a:avLst/>
+          </a:prstGeom>
+          <a:noFill/>
+        </p:spPr>
+        <p:txBody>
+          <a:bodyPr wrap="square" lIns="0" rIns="0" tIns="0" bIns="0" anchor="t">
+            <a:normAutofit fontScale="100000" lnSpcReduction="0"/>
+          </a:bodyPr>
+          <a:lstStyle/>
+          <a:p>
+            <a:pPr>
+              <a:spcBef>
+                <a:spcPts val="0"/>
+              </a:spcBef>
+              <a:spcAft>
+                <a:spcPts val="0"/>
+              </a:spcAft>
+              <a:defRPr sz="1000" b="0">
+                <a:solidFill>
+                  <a:srgbClr val="D0002B"/>
+                </a:solidFill>
+                <a:latin typeface="Arial"/>
+              </a:defRPr>
+            </a:pPr>
+            <a:r>
+              <a:rPr sz="1000">
+                <a:solidFill>
+                  <a:srgbClr val="F7F8FC"/>
+                </a:solidFill>
+                <a:latin typeface="Arial"/>
+                <a:hlinkClick r:id="rId8"/>
+              </a:rPr>
+              <a:t>Play quiz</a:t>
+            </a:r>
+          </a:p>
+        </p:txBody>
+      </p:sp>
+      <p:sp>
+        <p:nvSpPr>
+          <p:cNvPr id="23" name="Quiz PDF W02-L05"/>
+          <p:cNvSpPr txBox="1"/>
+          <p:nvPr/>
+        </p:nvSpPr>
+        <p:spPr>
+          <a:xfrm>
+            <a:off x="7296912" y="6606540"/>
+            <a:ext cx="1005840" cy="210312"/>
+          </a:xfrm>
+          <a:prstGeom prst="rect">
+            <a:avLst/>
+          </a:prstGeom>
+          <a:noFill/>
+        </p:spPr>
+        <p:txBody>
+          <a:bodyPr wrap="square" lIns="0" rIns="0" tIns="0" bIns="0" anchor="t">
+            <a:normAutofit fontScale="100000" lnSpcReduction="0"/>
+          </a:bodyPr>
+          <a:lstStyle/>
+          <a:p>
+            <a:pPr>
+              <a:spcBef>
+                <a:spcPts val="0"/>
+              </a:spcBef>
+              <a:spcAft>
+                <a:spcPts val="0"/>
+              </a:spcAft>
+              <a:defRPr sz="1000" b="0">
+                <a:solidFill>
+                  <a:srgbClr val="D0002B"/>
+                </a:solidFill>
+                <a:latin typeface="Arial"/>
+              </a:defRPr>
+            </a:pPr>
+            <a:r>
+              <a:rPr sz="1000">
+                <a:solidFill>
+                  <a:srgbClr val="F7F8FC"/>
+                </a:solidFill>
+                <a:latin typeface="Arial"/>
+                <a:hlinkClick r:id="rId9"/>
+              </a:rPr>
+              <a:t>Quiz PDF</a:t>
+            </a:r>
+          </a:p>
+        </p:txBody>
+      </p:sp>
     </p:spTree>
   </p:cSld>
   <p:clrMapOvr>
@@ -37214,6 +37312,104 @@
                 <a:latin typeface="Arial"/>
               </a:rPr>
               <a:t>Day 05  •  2026-11-04  •  43</a:t>
+            </a:r>
+          </a:p>
+        </p:txBody>
+      </p:sp>
+      <p:sp>
+        <p:nvSpPr>
+          <p:cNvPr id="22" name="Play quiz W02-L06"/>
+          <p:cNvSpPr txBox="1"/>
+          <p:nvPr/>
+        </p:nvSpPr>
+        <p:spPr>
+          <a:xfrm>
+            <a:off x="6355080" y="6606540"/>
+            <a:ext cx="822960" cy="210312"/>
+          </a:xfrm>
+          <a:prstGeom prst="rect">
+            <a:avLst/>
+          </a:prstGeom>
+          <a:noFill/>
+        </p:spPr>
+        <p:txBody>
+          <a:bodyPr wrap="square" lIns="0" rIns="0" tIns="0" bIns="0" anchor="t">
+            <a:normAutofit fontScale="100000" lnSpcReduction="0"/>
+          </a:bodyPr>
+          <a:lstStyle/>
+          <a:p>
+            <a:pPr>
+              <a:spcBef>
+                <a:spcPts val="0"/>
+              </a:spcBef>
+              <a:spcAft>
+                <a:spcPts val="0"/>
+              </a:spcAft>
+              <a:defRPr sz="1000" b="0">
+                <a:solidFill>
+                  <a:srgbClr val="D0002B"/>
+                </a:solidFill>
+                <a:latin typeface="Arial"/>
+              </a:defRPr>
+            </a:pPr>
+            <a:r>
+              <a:rPr sz="1000">
+                <a:solidFill>
+                  <a:srgbClr val="F7F8FC"/>
+                </a:solidFill>
+                <a:latin typeface="Arial"/>
+                <a:hlinkClick r:id="rId8"/>
+              </a:rPr>
+              <a:t>Play quiz</a:t>
+            </a:r>
+          </a:p>
+        </p:txBody>
+      </p:sp>
+      <p:sp>
+        <p:nvSpPr>
+          <p:cNvPr id="23" name="Quiz PDF W02-L06"/>
+          <p:cNvSpPr txBox="1"/>
+          <p:nvPr/>
+        </p:nvSpPr>
+        <p:spPr>
+          <a:xfrm>
+            <a:off x="7296912" y="6606540"/>
+            <a:ext cx="1005840" cy="210312"/>
+          </a:xfrm>
+          <a:prstGeom prst="rect">
+            <a:avLst/>
+          </a:prstGeom>
+          <a:noFill/>
+        </p:spPr>
+        <p:txBody>
+          <a:bodyPr wrap="square" lIns="0" rIns="0" tIns="0" bIns="0" anchor="t">
+            <a:normAutofit fontScale="100000" lnSpcReduction="0"/>
+          </a:bodyPr>
+          <a:lstStyle/>
+          <a:p>
+            <a:pPr>
+              <a:spcBef>
+                <a:spcPts val="0"/>
+              </a:spcBef>
+              <a:spcAft>
+                <a:spcPts val="0"/>
+              </a:spcAft>
+              <a:defRPr sz="1000" b="0">
+                <a:solidFill>
+                  <a:srgbClr val="D0002B"/>
+                </a:solidFill>
+                <a:latin typeface="Arial"/>
+              </a:defRPr>
+            </a:pPr>
+            <a:r>
+              <a:rPr sz="1000">
+                <a:solidFill>
+                  <a:srgbClr val="F7F8FC"/>
+                </a:solidFill>
+                <a:latin typeface="Arial"/>
+                <a:hlinkClick r:id="rId9"/>
+              </a:rPr>
+              <a:t>Quiz PDF</a:t>
             </a:r>
           </a:p>
         </p:txBody>
